--- a/neerlandais1/powerpoints/Er_Les_cinq_emplois_de_er.pptx
+++ b/neerlandais1/powerpoints/Er_Les_cinq_emplois_de_er.pptx
@@ -133,19 +133,19 @@
   <p:extLst>
     <p:ext uri="{521415D9-36F7-43E2-AB2F-B90AF26B5E84}">
       <p14:sectionLst xmlns:p14="http://schemas.microsoft.com/office/powerpoint/2010/main">
-        <p14:section name="Ouverture" id="{2082d4cb-7ccc-68e5-8f33-0e3d1d82b533}">
+        <p14:section name="Ouverture" id="{80fdf39b-2422-fccc-4add-71e03069e47e}">
           <p14:sldIdLst>
             <p14:sldId id="256"/>
           </p14:sldIdLst>
         </p14:section>
-        <p14:section name="Découvrir" id="{c4b2be60-df6b-35b7-73c5-fb8ee63f6aff}">
+        <p14:section name="Découvrir" id="{6a56308d-b561-a11f-616e-825819a04d62}">
           <p14:sldIdLst>
             <p14:sldId id="257"/>
             <p14:sldId id="258"/>
             <p14:sldId id="259"/>
           </p14:sldIdLst>
         </p14:section>
-        <p14:section name="Les cinq emplois" id="{ea7567d2-85ba-4f81-8296-7b20c70c570e}">
+        <p14:section name="Les cinq emplois" id="{5b29d399-06fb-b505-187e-3931835d40ce}">
           <p14:sldIdLst>
             <p14:sldId id="260"/>
             <p14:sldId id="261"/>
@@ -155,7 +155,7 @@
             <p14:sldId id="265"/>
           </p14:sldIdLst>
         </p14:section>
-        <p14:section name="Placer et distinguer" id="{a4716927-0d8b-dc8e-15aa-261784017bfb}">
+        <p14:section name="Placer et distinguer" id="{42bbc7b8-1092-c405-53f4-298873e1bf0f}">
           <p14:sldIdLst>
             <p14:sldId id="266"/>
             <p14:sldId id="267"/>
@@ -164,7 +164,7 @@
             <p14:sldId id="270"/>
           </p14:sldIdLst>
         </p14:section>
-        <p14:section name="JIJ NU ! — Oefeningen" id="{e18d7da1-6529-70ec-eacf-f7d7a4f0118b}">
+        <p14:section name="JIJ NU ! — Oefeningen" id="{7ee58c5a-6958-941b-d5e6-bd4a2d8789d9}">
           <p14:sldIdLst>
             <p14:sldId id="271"/>
             <p14:sldId id="272"/>
@@ -179,7 +179,7 @@
             <p14:sldId id="281"/>
           </p14:sldIdLst>
         </p14:section>
-        <p14:section name="Clôture" id="{5156372e-0a7d-5196-b6a7-7748636ceae4}">
+        <p14:section name="Clôture" id="{c9e6e65e-f49e-d339-d60b-a66fd96b4f7e}">
           <p14:sldIdLst>
             <p14:sldId id="282"/>
           </p14:sldIdLst>

--- a/neerlandais1/powerpoints/Er_Les_cinq_emplois_de_er.pptx
+++ b/neerlandais1/powerpoints/Er_Les_cinq_emplois_de_er.pptx
@@ -133,19 +133,19 @@
   <p:extLst>
     <p:ext uri="{521415D9-36F7-43E2-AB2F-B90AF26B5E84}">
       <p14:sectionLst xmlns:p14="http://schemas.microsoft.com/office/powerpoint/2010/main">
-        <p14:section name="Ouverture" id="{80fdf39b-2422-fccc-4add-71e03069e47e}">
+        <p14:section name="Ouverture" id="{5361135e-0aac-2e25-363b-7a1bc9fb3026}">
           <p14:sldIdLst>
             <p14:sldId id="256"/>
           </p14:sldIdLst>
         </p14:section>
-        <p14:section name="Découvrir" id="{6a56308d-b561-a11f-616e-825819a04d62}">
+        <p14:section name="Découvrir" id="{943026fa-9a0a-4eaa-ac09-8faf4b615e4e}">
           <p14:sldIdLst>
             <p14:sldId id="257"/>
             <p14:sldId id="258"/>
             <p14:sldId id="259"/>
           </p14:sldIdLst>
         </p14:section>
-        <p14:section name="Les cinq emplois" id="{5b29d399-06fb-b505-187e-3931835d40ce}">
+        <p14:section name="Les cinq emplois" id="{897a78b2-544d-6039-c47c-410540366939}">
           <p14:sldIdLst>
             <p14:sldId id="260"/>
             <p14:sldId id="261"/>
@@ -155,7 +155,7 @@
             <p14:sldId id="265"/>
           </p14:sldIdLst>
         </p14:section>
-        <p14:section name="Placer et distinguer" id="{42bbc7b8-1092-c405-53f4-298873e1bf0f}">
+        <p14:section name="Placer et distinguer" id="{0adca79c-b4ac-7b44-eca2-e4f6980e56b5}">
           <p14:sldIdLst>
             <p14:sldId id="266"/>
             <p14:sldId id="267"/>
@@ -164,7 +164,7 @@
             <p14:sldId id="270"/>
           </p14:sldIdLst>
         </p14:section>
-        <p14:section name="JIJ NU ! — Oefeningen" id="{7ee58c5a-6958-941b-d5e6-bd4a2d8789d9}">
+        <p14:section name="JIJ NU ! — Oefeningen" id="{d4d3ad66-d22d-81d7-9126-ef1c6d1ee94b}">
           <p14:sldIdLst>
             <p14:sldId id="271"/>
             <p14:sldId id="272"/>
@@ -179,7 +179,7 @@
             <p14:sldId id="281"/>
           </p14:sldIdLst>
         </p14:section>
-        <p14:section name="Clôture" id="{c9e6e65e-f49e-d339-d60b-a66fd96b4f7e}">
+        <p14:section name="Clôture" id="{e018f4f6-71ab-f757-6bc2-b83bece08b5e}">
           <p14:sldIdLst>
             <p14:sldId id="282"/>
           </p14:sldIdLst>

--- a/neerlandais1/powerpoints/Er_Les_cinq_emplois_de_er.pptx
+++ b/neerlandais1/powerpoints/Er_Les_cinq_emplois_de_er.pptx
@@ -133,19 +133,19 @@
   <p:extLst>
     <p:ext uri="{521415D9-36F7-43E2-AB2F-B90AF26B5E84}">
       <p14:sectionLst xmlns:p14="http://schemas.microsoft.com/office/powerpoint/2010/main">
-        <p14:section name="Ouverture" id="{5361135e-0aac-2e25-363b-7a1bc9fb3026}">
+        <p14:section name="Ouverture" id="{46e6a3d2-d553-d680-8fa2-257e87e85c64}">
           <p14:sldIdLst>
             <p14:sldId id="256"/>
           </p14:sldIdLst>
         </p14:section>
-        <p14:section name="Découvrir" id="{943026fa-9a0a-4eaa-ac09-8faf4b615e4e}">
+        <p14:section name="Découvrir" id="{d4c70497-7e13-206c-aa53-bde40c0568cf}">
           <p14:sldIdLst>
             <p14:sldId id="257"/>
             <p14:sldId id="258"/>
             <p14:sldId id="259"/>
           </p14:sldIdLst>
         </p14:section>
-        <p14:section name="Les cinq emplois" id="{897a78b2-544d-6039-c47c-410540366939}">
+        <p14:section name="Les cinq emplois" id="{a3ee7bbb-5d33-d23f-c445-8cdd012bbd75}">
           <p14:sldIdLst>
             <p14:sldId id="260"/>
             <p14:sldId id="261"/>
@@ -155,7 +155,7 @@
             <p14:sldId id="265"/>
           </p14:sldIdLst>
         </p14:section>
-        <p14:section name="Placer et distinguer" id="{0adca79c-b4ac-7b44-eca2-e4f6980e56b5}">
+        <p14:section name="Placer et distinguer" id="{221c32ca-f703-3a7a-0e9e-54d0268ee428}">
           <p14:sldIdLst>
             <p14:sldId id="266"/>
             <p14:sldId id="267"/>
@@ -164,7 +164,7 @@
             <p14:sldId id="270"/>
           </p14:sldIdLst>
         </p14:section>
-        <p14:section name="JIJ NU ! — Oefeningen" id="{d4d3ad66-d22d-81d7-9126-ef1c6d1ee94b}">
+        <p14:section name="JIJ NU ! — Oefeningen" id="{b45acbc7-116f-a6c5-bad9-57e6158c2b98}">
           <p14:sldIdLst>
             <p14:sldId id="271"/>
             <p14:sldId id="272"/>
@@ -179,7 +179,7 @@
             <p14:sldId id="281"/>
           </p14:sldIdLst>
         </p14:section>
-        <p14:section name="Clôture" id="{e018f4f6-71ab-f757-6bc2-b83bece08b5e}">
+        <p14:section name="Clôture" id="{19ff0b1b-f5c3-bd3c-425d-229db49e740d}">
           <p14:sldIdLst>
             <p14:sldId id="282"/>
           </p14:sldIdLst>
